--- a/docs/산출물_20260917/06_ECS_화면설계서.pptx
+++ b/docs/산출물_20260917/06_ECS_화면설계서.pptx
@@ -13214,7 +13214,7 @@
         </p:nvGraphicFramePr>
         <p:xfrm>
           <a:off x="457200" y="1097280"/>
-          <a:ext cx="11338560" cy="4224528"/>
+          <a:ext cx="11338560" cy="4608576"/>
         </p:xfrm>
         <a:graphic>
           <a:graphicData uri="http://schemas.openxmlformats.org/drawingml/2006/table">
@@ -13971,6 +13971,74 @@
                   <a:tcPr marT="27432" marB="27432">
                     <a:solidFill>
                       <a:srgbClr val="EEF1F7"/>
+                    </a:solidFill>
+                  </a:tcPr>
+                </a:tc>
+              </a:tr>
+              <a:tr h="384048">
+                <a:tc>
+                  <a:txBody>
+                    <a:bodyPr/>
+                    <a:lstStyle/>
+                    <a:p>
+                      <a:r>
+                        <a:rPr sz="1050">
+                          <a:solidFill>
+                            <a:srgbClr val="222222"/>
+                          </a:solidFill>
+                          <a:latin typeface="맑은 고딕"/>
+                        </a:rPr>
+                        <a:t>11</a:t>
+                      </a:r>
+                    </a:p>
+                  </a:txBody>
+                  <a:tcPr marT="27432" marB="27432">
+                    <a:solidFill>
+                      <a:srgbClr val="FFFFFF"/>
+                    </a:solidFill>
+                  </a:tcPr>
+                </a:tc>
+                <a:tc>
+                  <a:txBody>
+                    <a:bodyPr/>
+                    <a:lstStyle/>
+                    <a:p>
+                      <a:r>
+                        <a:rPr sz="1050">
+                          <a:solidFill>
+                            <a:srgbClr val="222222"/>
+                          </a:solidFill>
+                          <a:latin typeface="맑은 고딕"/>
+                        </a:rPr>
+                        <a:t>작업대 명칭</a:t>
+                      </a:r>
+                    </a:p>
+                  </a:txBody>
+                  <a:tcPr marT="27432" marB="27432">
+                    <a:solidFill>
+                      <a:srgbClr val="FFFFFF"/>
+                    </a:solidFill>
+                  </a:tcPr>
+                </a:tc>
+                <a:tc>
+                  <a:txBody>
+                    <a:bodyPr/>
+                    <a:lstStyle/>
+                    <a:p>
+                      <a:r>
+                        <a:rPr sz="1050">
+                          <a:solidFill>
+                            <a:srgbClr val="222222"/>
+                          </a:solidFill>
+                          <a:latin typeface="맑은 고딕"/>
+                        </a:rPr>
+                        <a:t>위치 정정(103=TR#24 입고대, 104=TR#26 출고대), 102 를 출고대(TR#29)/입고대(TR#30) 둘로 분리, 글자색 = 범례 입고/출고색, 101 = 핑크</a:t>
+                      </a:r>
+                    </a:p>
+                  </a:txBody>
+                  <a:tcPr marT="27432" marB="27432">
+                    <a:solidFill>
+                      <a:srgbClr val="FFFFFF"/>
                     </a:solidFill>
                   </a:tcPr>
                 </a:tc>
@@ -16851,7 +16919,7 @@
         <p:spPr>
           <a:xfrm>
             <a:off x="457200" y="1097280"/>
-            <a:ext cx="5120640" cy="4761105"/>
+            <a:ext cx="5212080" cy="3927032"/>
           </a:xfrm>
           <a:prstGeom prst="rect">
             <a:avLst/>
@@ -17389,6 +17457,30 @@
                 <a:latin typeface="맑은 고딕"/>
               </a:rPr>
               <a:t>· 트랙 글자는 리본 [창고 모니터링] 선택(작업번호/트랙번호/제품정보)을 따른다.</a:t>
+            </a:r>
+          </a:p>
+          <a:p>
+            <a:pPr algn="l"/>
+            <a:r>
+              <a:rPr sz="1050" b="0">
+                <a:solidFill>
+                  <a:srgbClr val="595959"/>
+                </a:solidFill>
+                <a:latin typeface="맑은 고딕"/>
+              </a:rPr>
+              <a:t>· 작업대 명칭은 해당 트랙 왼쪽에 둔다 : 103 제품 입고대(TR#24) · 104 원부자재불출대(TR#26) · 102 피킹 작업대(출고대 TR#29 / 입고대 TR#30) · [101] 입출고대(TR#22).</a:t>
+            </a:r>
+          </a:p>
+          <a:p>
+            <a:pPr algn="l"/>
+            <a:r>
+              <a:rPr sz="1050" b="0">
+                <a:solidFill>
+                  <a:srgbClr val="595959"/>
+                </a:solidFill>
+                <a:latin typeface="맑은 고딕"/>
+              </a:rPr>
+              <a:t>· 명칭 글자색 : 입고대 = 범례 입고색, 출고대 = 범례 출고색(범례 변경 시 함께 바뀜), 101 입출고대 = 핑크 고정.</a:t>
             </a:r>
           </a:p>
         </p:txBody>
